--- a/python_course/chapter_08_tuples_and_sets/presentation.pptx
+++ b/python_course/chapter_08_tuples_and_sets/presentation.pptx
@@ -17,7 +17,7 @@
     <p:sldId id="265" r:id="rId16"/>
     <p:sldId id="266" r:id="rId17"/>
   </p:sldIdLst>
-  <p:sldSz cx="9144000" cy="6858000" type="screen4x3"/>
+  <p:sldSz cx="12191695" cy="6858000" type="screen4x3"/>
   <p:notesSz cx="6858000" cy="9144000"/>
   <p:defaultTextStyle>
     <a:defPPr>
@@ -3107,7 +3107,7 @@
         <p:spPr>
           <a:xfrm>
             <a:off x="0" y="0"/>
-            <a:ext cx="9144000" cy="6858000"/>
+            <a:ext cx="12191695" cy="6858000"/>
           </a:xfrm>
           <a:prstGeom prst="rect">
             <a:avLst/>
@@ -3149,8 +3149,8 @@
         </p:nvSpPr>
         <p:spPr>
           <a:xfrm>
-            <a:off x="914400" y="2286000"/>
-            <a:ext cx="7315200" cy="914400"/>
+            <a:off x="914400" y="1828800"/>
+            <a:ext cx="10360152" cy="1371600"/>
           </a:xfrm>
           <a:prstGeom prst="rect">
             <a:avLst/>
@@ -3184,8 +3184,8 @@
         </p:nvSpPr>
         <p:spPr>
           <a:xfrm>
-            <a:off x="914400" y="3474720"/>
-            <a:ext cx="7315200" cy="548640"/>
+            <a:off x="914400" y="3657600"/>
+            <a:ext cx="10360152" cy="548640"/>
           </a:xfrm>
           <a:prstGeom prst="rect">
             <a:avLst/>
@@ -3219,8 +3219,8 @@
         </p:nvSpPr>
         <p:spPr>
           <a:xfrm>
-            <a:off x="914400" y="4114800"/>
-            <a:ext cx="7315200" cy="548640"/>
+            <a:off x="914400" y="4297680"/>
+            <a:ext cx="10360152" cy="548640"/>
           </a:xfrm>
           <a:prstGeom prst="rect">
             <a:avLst/>
@@ -3273,7 +3273,7 @@
         <p:spPr>
           <a:xfrm>
             <a:off x="0" y="0"/>
-            <a:ext cx="9144000" cy="6858000"/>
+            <a:ext cx="12191695" cy="6858000"/>
           </a:xfrm>
           <a:prstGeom prst="rect">
             <a:avLst/>
@@ -3316,7 +3316,7 @@
         <p:spPr>
           <a:xfrm>
             <a:off x="0" y="0"/>
-            <a:ext cx="9144000" cy="137160"/>
+            <a:ext cx="12191695" cy="137160"/>
           </a:xfrm>
           <a:prstGeom prst="rect">
             <a:avLst/>
@@ -3359,7 +3359,7 @@
         <p:spPr>
           <a:xfrm>
             <a:off x="457200" y="365760"/>
-            <a:ext cx="8229600" cy="731520"/>
+            <a:ext cx="10972800" cy="731520"/>
           </a:xfrm>
           <a:prstGeom prst="rect">
             <a:avLst/>
@@ -3437,7 +3437,7 @@
         <p:spPr>
           <a:xfrm>
             <a:off x="640080" y="1371600"/>
-            <a:ext cx="7863840" cy="3657600"/>
+            <a:ext cx="10789920" cy="4572000"/>
           </a:xfrm>
           <a:prstGeom prst="rect">
             <a:avLst/>
@@ -3613,7 +3613,7 @@
         <p:spPr>
           <a:xfrm>
             <a:off x="0" y="0"/>
-            <a:ext cx="9144000" cy="6858000"/>
+            <a:ext cx="12191695" cy="6858000"/>
           </a:xfrm>
           <a:prstGeom prst="rect">
             <a:avLst/>
@@ -3655,8 +3655,8 @@
         </p:nvSpPr>
         <p:spPr>
           <a:xfrm>
-            <a:off x="914400" y="2286000"/>
-            <a:ext cx="7315200" cy="914400"/>
+            <a:off x="914400" y="1828800"/>
+            <a:ext cx="10360152" cy="1371600"/>
           </a:xfrm>
           <a:prstGeom prst="rect">
             <a:avLst/>
@@ -3690,8 +3690,8 @@
         </p:nvSpPr>
         <p:spPr>
           <a:xfrm>
-            <a:off x="914400" y="3474720"/>
-            <a:ext cx="7315200" cy="548640"/>
+            <a:off x="914400" y="3657600"/>
+            <a:ext cx="10360152" cy="548640"/>
           </a:xfrm>
           <a:prstGeom prst="rect">
             <a:avLst/>
@@ -3725,8 +3725,8 @@
         </p:nvSpPr>
         <p:spPr>
           <a:xfrm>
-            <a:off x="914400" y="4114800"/>
-            <a:ext cx="7315200" cy="548640"/>
+            <a:off x="914400" y="4297680"/>
+            <a:ext cx="10360152" cy="548640"/>
           </a:xfrm>
           <a:prstGeom prst="rect">
             <a:avLst/>
@@ -3779,7 +3779,7 @@
         <p:spPr>
           <a:xfrm>
             <a:off x="0" y="0"/>
-            <a:ext cx="9144000" cy="6858000"/>
+            <a:ext cx="12191695" cy="6858000"/>
           </a:xfrm>
           <a:prstGeom prst="rect">
             <a:avLst/>
@@ -3822,7 +3822,7 @@
         <p:spPr>
           <a:xfrm>
             <a:off x="0" y="0"/>
-            <a:ext cx="9144000" cy="137160"/>
+            <a:ext cx="12191695" cy="137160"/>
           </a:xfrm>
           <a:prstGeom prst="rect">
             <a:avLst/>
@@ -3865,7 +3865,7 @@
         <p:spPr>
           <a:xfrm>
             <a:off x="457200" y="365760"/>
-            <a:ext cx="8229600" cy="731520"/>
+            <a:ext cx="10972800" cy="731520"/>
           </a:xfrm>
           <a:prstGeom prst="rect">
             <a:avLst/>
@@ -3943,7 +3943,7 @@
         <p:spPr>
           <a:xfrm>
             <a:off x="640080" y="1371600"/>
-            <a:ext cx="7863840" cy="3657600"/>
+            <a:ext cx="10789920" cy="4572000"/>
           </a:xfrm>
           <a:prstGeom prst="rect">
             <a:avLst/>
@@ -4104,7 +4104,7 @@
         <p:spPr>
           <a:xfrm>
             <a:off x="0" y="0"/>
-            <a:ext cx="9144000" cy="6858000"/>
+            <a:ext cx="12191695" cy="6858000"/>
           </a:xfrm>
           <a:prstGeom prst="rect">
             <a:avLst/>
@@ -4147,7 +4147,7 @@
         <p:spPr>
           <a:xfrm>
             <a:off x="0" y="0"/>
-            <a:ext cx="9144000" cy="137160"/>
+            <a:ext cx="12191695" cy="137160"/>
           </a:xfrm>
           <a:prstGeom prst="rect">
             <a:avLst/>
@@ -4190,7 +4190,7 @@
         <p:spPr>
           <a:xfrm>
             <a:off x="457200" y="365760"/>
-            <a:ext cx="8229600" cy="731520"/>
+            <a:ext cx="10972800" cy="731520"/>
           </a:xfrm>
           <a:prstGeom prst="rect">
             <a:avLst/>
@@ -4268,7 +4268,7 @@
         <p:spPr>
           <a:xfrm>
             <a:off x="640080" y="1371600"/>
-            <a:ext cx="7863840" cy="3657600"/>
+            <a:ext cx="10789920" cy="4572000"/>
           </a:xfrm>
           <a:prstGeom prst="rect">
             <a:avLst/>
@@ -4339,7 +4339,7 @@
         <p:spPr>
           <a:xfrm>
             <a:off x="0" y="0"/>
-            <a:ext cx="9144000" cy="6858000"/>
+            <a:ext cx="12191695" cy="6858000"/>
           </a:xfrm>
           <a:prstGeom prst="rect">
             <a:avLst/>
@@ -4382,7 +4382,7 @@
         <p:spPr>
           <a:xfrm>
             <a:off x="0" y="0"/>
-            <a:ext cx="9144000" cy="137160"/>
+            <a:ext cx="12191695" cy="137160"/>
           </a:xfrm>
           <a:prstGeom prst="rect">
             <a:avLst/>
@@ -4425,7 +4425,7 @@
         <p:spPr>
           <a:xfrm>
             <a:off x="457200" y="365760"/>
-            <a:ext cx="8229600" cy="731520"/>
+            <a:ext cx="10972800" cy="731520"/>
           </a:xfrm>
           <a:prstGeom prst="rect">
             <a:avLst/>
@@ -4503,7 +4503,7 @@
         <p:spPr>
           <a:xfrm>
             <a:off x="640080" y="1371600"/>
-            <a:ext cx="7863840" cy="3657600"/>
+            <a:ext cx="10789920" cy="4572000"/>
           </a:xfrm>
           <a:prstGeom prst="rect">
             <a:avLst/>
@@ -4589,7 +4589,7 @@
         <p:spPr>
           <a:xfrm>
             <a:off x="0" y="0"/>
-            <a:ext cx="9144000" cy="6858000"/>
+            <a:ext cx="12191695" cy="6858000"/>
           </a:xfrm>
           <a:prstGeom prst="rect">
             <a:avLst/>
@@ -4632,7 +4632,7 @@
         <p:spPr>
           <a:xfrm>
             <a:off x="0" y="0"/>
-            <a:ext cx="9144000" cy="137160"/>
+            <a:ext cx="12191695" cy="137160"/>
           </a:xfrm>
           <a:prstGeom prst="rect">
             <a:avLst/>
@@ -4675,7 +4675,7 @@
         <p:spPr>
           <a:xfrm>
             <a:off x="457200" y="365760"/>
-            <a:ext cx="8229600" cy="731520"/>
+            <a:ext cx="10972800" cy="731520"/>
           </a:xfrm>
           <a:prstGeom prst="rect">
             <a:avLst/>
@@ -4753,7 +4753,7 @@
         <p:spPr>
           <a:xfrm>
             <a:off x="640080" y="1371600"/>
-            <a:ext cx="7863840" cy="3657600"/>
+            <a:ext cx="10789920" cy="4572000"/>
           </a:xfrm>
           <a:prstGeom prst="rect">
             <a:avLst/>
@@ -4944,7 +4944,7 @@
         <p:spPr>
           <a:xfrm>
             <a:off x="0" y="0"/>
-            <a:ext cx="9144000" cy="6858000"/>
+            <a:ext cx="12191695" cy="6858000"/>
           </a:xfrm>
           <a:prstGeom prst="rect">
             <a:avLst/>
@@ -4987,7 +4987,7 @@
         <p:spPr>
           <a:xfrm>
             <a:off x="0" y="0"/>
-            <a:ext cx="9144000" cy="137160"/>
+            <a:ext cx="12191695" cy="137160"/>
           </a:xfrm>
           <a:prstGeom prst="rect">
             <a:avLst/>
@@ -5030,7 +5030,7 @@
         <p:spPr>
           <a:xfrm>
             <a:off x="457200" y="365760"/>
-            <a:ext cx="8229600" cy="731520"/>
+            <a:ext cx="10972800" cy="731520"/>
           </a:xfrm>
           <a:prstGeom prst="rect">
             <a:avLst/>
@@ -5108,7 +5108,7 @@
         <p:spPr>
           <a:xfrm>
             <a:off x="640080" y="1371600"/>
-            <a:ext cx="7863840" cy="3657600"/>
+            <a:ext cx="10789920" cy="4572000"/>
           </a:xfrm>
           <a:prstGeom prst="rect">
             <a:avLst/>
@@ -5254,7 +5254,7 @@
         <p:spPr>
           <a:xfrm>
             <a:off x="0" y="0"/>
-            <a:ext cx="9144000" cy="6858000"/>
+            <a:ext cx="12191695" cy="6858000"/>
           </a:xfrm>
           <a:prstGeom prst="rect">
             <a:avLst/>
@@ -5297,7 +5297,7 @@
         <p:spPr>
           <a:xfrm>
             <a:off x="0" y="0"/>
-            <a:ext cx="9144000" cy="137160"/>
+            <a:ext cx="12191695" cy="137160"/>
           </a:xfrm>
           <a:prstGeom prst="rect">
             <a:avLst/>
@@ -5340,7 +5340,7 @@
         <p:spPr>
           <a:xfrm>
             <a:off x="457200" y="365760"/>
-            <a:ext cx="8229600" cy="731520"/>
+            <a:ext cx="10972800" cy="731520"/>
           </a:xfrm>
           <a:prstGeom prst="rect">
             <a:avLst/>
@@ -5418,7 +5418,7 @@
         <p:spPr>
           <a:xfrm>
             <a:off x="640080" y="1371600"/>
-            <a:ext cx="7863840" cy="3657600"/>
+            <a:ext cx="10789920" cy="4572000"/>
           </a:xfrm>
           <a:prstGeom prst="rect">
             <a:avLst/>
@@ -5489,7 +5489,7 @@
         <p:spPr>
           <a:xfrm>
             <a:off x="0" y="0"/>
-            <a:ext cx="9144000" cy="6858000"/>
+            <a:ext cx="12191695" cy="6858000"/>
           </a:xfrm>
           <a:prstGeom prst="rect">
             <a:avLst/>
@@ -5532,7 +5532,7 @@
         <p:spPr>
           <a:xfrm>
             <a:off x="0" y="0"/>
-            <a:ext cx="9144000" cy="137160"/>
+            <a:ext cx="12191695" cy="137160"/>
           </a:xfrm>
           <a:prstGeom prst="rect">
             <a:avLst/>
@@ -5575,7 +5575,7 @@
         <p:spPr>
           <a:xfrm>
             <a:off x="457200" y="365760"/>
-            <a:ext cx="8229600" cy="731520"/>
+            <a:ext cx="10972800" cy="731520"/>
           </a:xfrm>
           <a:prstGeom prst="rect">
             <a:avLst/>
@@ -5653,7 +5653,7 @@
         <p:spPr>
           <a:xfrm>
             <a:off x="640080" y="1371600"/>
-            <a:ext cx="7863840" cy="3657600"/>
+            <a:ext cx="10789920" cy="4572000"/>
           </a:xfrm>
           <a:prstGeom prst="rect">
             <a:avLst/>
@@ -5739,7 +5739,7 @@
         <p:spPr>
           <a:xfrm>
             <a:off x="0" y="0"/>
-            <a:ext cx="9144000" cy="6858000"/>
+            <a:ext cx="12191695" cy="6858000"/>
           </a:xfrm>
           <a:prstGeom prst="rect">
             <a:avLst/>
@@ -5782,7 +5782,7 @@
         <p:spPr>
           <a:xfrm>
             <a:off x="0" y="0"/>
-            <a:ext cx="9144000" cy="137160"/>
+            <a:ext cx="12191695" cy="137160"/>
           </a:xfrm>
           <a:prstGeom prst="rect">
             <a:avLst/>
@@ -5825,7 +5825,7 @@
         <p:spPr>
           <a:xfrm>
             <a:off x="457200" y="365760"/>
-            <a:ext cx="8229600" cy="731520"/>
+            <a:ext cx="10972800" cy="731520"/>
           </a:xfrm>
           <a:prstGeom prst="rect">
             <a:avLst/>
@@ -5903,7 +5903,7 @@
         <p:spPr>
           <a:xfrm>
             <a:off x="640080" y="1371600"/>
-            <a:ext cx="7863840" cy="3657600"/>
+            <a:ext cx="10789920" cy="4572000"/>
           </a:xfrm>
           <a:prstGeom prst="rect">
             <a:avLst/>
